--- a/docs/the-odyssey-deck.pptx
+++ b/docs/the-odyssey-deck.pptx
@@ -3029,7 +3029,7 @@
                 <a:ea typeface="Calibri" pitchFamily="34" charset="-122"/>
                 <a:cs typeface="Calibri" pitchFamily="34" charset="-120"/>
               </a:rPr>
-              <a:t>typecheck, lint, 117 assertions, ~2 seconds</a:t>
+              <a:t>typecheck, lint, 123 assertions, ~2 seconds</a:t>
             </a:r>
             <a:endParaRPr lang="en-US" sz="1150" dirty="0"/>
           </a:p>
